--- a/AI_HipHop_Presentation_Final_With_Notes.pptx
+++ b/AI_HipHop_Presentation_Final_With_Notes.pptx
@@ -697,7 +697,7 @@
           <a:p>
             <a:fld id="{83C05EEB-E9E3-4772-8020-1E9BDD57821C}" type="datetimeFigureOut">
               <a:rPr lang="en-US" smtClean="0"/>
-              <a:t>6/21/2026</a:t>
+              <a:t>6/22/2026</a:t>
             </a:fld>
             <a:endParaRPr lang="en-US"/>
           </a:p>
@@ -1045,39 +1045,6 @@
               </a:spcAft>
             </a:pPr>
             <a:r>
-              <a:rPr lang="en-US" sz="1800" b="1" dirty="0">
-                <a:effectLst/>
-                <a:latin typeface="Calibri" panose="020F0502020204030204" pitchFamily="34" charset="0"/>
-                <a:ea typeface="Times New Roman" panose="02020603050405020304" pitchFamily="18" charset="0"/>
-                <a:cs typeface="Times New Roman" panose="02020603050405020304" pitchFamily="18" charset="0"/>
-              </a:rPr>
-              <a:t>Suggested duration:</a:t>
-            </a:r>
-            <a:r>
-              <a:rPr lang="en-US" sz="1800" dirty="0">
-                <a:effectLst/>
-                <a:latin typeface="Calibri" panose="020F0502020204030204" pitchFamily="34" charset="0"/>
-                <a:ea typeface="Times New Roman" panose="02020603050405020304" pitchFamily="18" charset="0"/>
-                <a:cs typeface="Times New Roman" panose="02020603050405020304" pitchFamily="18" charset="0"/>
-              </a:rPr>
-              <a:t> 1 minute 30 seconds</a:t>
-            </a:r>
-            <a:endParaRPr lang="en-US" sz="1800" dirty="0">
-              <a:effectLst/>
-              <a:latin typeface="Times New Roman" panose="02020603050405020304" pitchFamily="18" charset="0"/>
-              <a:ea typeface="Times New Roman" panose="02020603050405020304" pitchFamily="18" charset="0"/>
-            </a:endParaRPr>
-          </a:p>
-          <a:p>
-            <a:pPr marL="0" marR="0">
-              <a:spcBef>
-                <a:spcPts val="0"/>
-              </a:spcBef>
-              <a:spcAft>
-                <a:spcPts val="0"/>
-              </a:spcAft>
-            </a:pPr>
-            <a:r>
               <a:rPr lang="en-US" sz="1800" dirty="0">
                 <a:effectLst/>
                 <a:latin typeface="Calibri" panose="020F0502020204030204" pitchFamily="34" charset="0"/>
@@ -1334,178 +1301,13 @@
               </a:spcAft>
             </a:pPr>
             <a:r>
-              <a:rPr lang="en-US" sz="1800" b="1" dirty="0">
-                <a:effectLst/>
-                <a:latin typeface="Calibri" panose="020F0502020204030204" pitchFamily="34" charset="0"/>
-                <a:ea typeface="Times New Roman" panose="02020603050405020304" pitchFamily="18" charset="0"/>
-                <a:cs typeface="Times New Roman" panose="02020603050405020304" pitchFamily="18" charset="0"/>
-              </a:rPr>
-              <a:t>Suggested duration:</a:t>
-            </a:r>
-            <a:r>
               <a:rPr lang="en-US" sz="1800" dirty="0">
                 <a:effectLst/>
                 <a:latin typeface="Calibri" panose="020F0502020204030204" pitchFamily="34" charset="0"/>
                 <a:ea typeface="Times New Roman" panose="02020603050405020304" pitchFamily="18" charset="0"/>
                 <a:cs typeface="Times New Roman" panose="02020603050405020304" pitchFamily="18" charset="0"/>
               </a:rPr>
-              <a:t> 1 minute 15 seconds</a:t>
-            </a:r>
-            <a:endParaRPr lang="en-US" sz="1800" dirty="0">
-              <a:effectLst/>
-              <a:latin typeface="Times New Roman" panose="02020603050405020304" pitchFamily="18" charset="0"/>
-              <a:ea typeface="Times New Roman" panose="02020603050405020304" pitchFamily="18" charset="0"/>
-            </a:endParaRPr>
-          </a:p>
-          <a:p>
-            <a:pPr marL="0" marR="0">
-              <a:spcBef>
-                <a:spcPts val="0"/>
-              </a:spcBef>
-              <a:spcAft>
-                <a:spcPts val="0"/>
-              </a:spcAft>
-            </a:pPr>
-            <a:r>
-              <a:rPr lang="en-US" sz="1800" dirty="0">
-                <a:effectLst/>
-                <a:latin typeface="Calibri" panose="020F0502020204030204" pitchFamily="34" charset="0"/>
-                <a:ea typeface="Times New Roman" panose="02020603050405020304" pitchFamily="18" charset="0"/>
-                <a:cs typeface="Times New Roman" panose="02020603050405020304" pitchFamily="18" charset="0"/>
-              </a:rPr>
-              <a:t>Lets talk about what current AI music systems can actually do.</a:t>
-            </a:r>
-            <a:endParaRPr lang="en-US" sz="1800" dirty="0">
-              <a:effectLst/>
-              <a:latin typeface="Times New Roman" panose="02020603050405020304" pitchFamily="18" charset="0"/>
-              <a:ea typeface="Times New Roman" panose="02020603050405020304" pitchFamily="18" charset="0"/>
-            </a:endParaRPr>
-          </a:p>
-          <a:p>
-            <a:pPr marL="0" marR="0">
-              <a:spcBef>
-                <a:spcPts val="0"/>
-              </a:spcBef>
-              <a:spcAft>
-                <a:spcPts val="0"/>
-              </a:spcAft>
-            </a:pPr>
-            <a:r>
-              <a:rPr lang="en-US" sz="1800" dirty="0">
-                <a:effectLst/>
-                <a:latin typeface="Calibri" panose="020F0502020204030204" pitchFamily="34" charset="0"/>
-                <a:ea typeface="Times New Roman" panose="02020603050405020304" pitchFamily="18" charset="0"/>
-                <a:cs typeface="Times New Roman" panose="02020603050405020304" pitchFamily="18" charset="0"/>
-              </a:rPr>
-              <a:t> </a:t>
-            </a:r>
-            <a:endParaRPr lang="en-US" sz="1800" dirty="0">
-              <a:effectLst/>
-              <a:latin typeface="Times New Roman" panose="02020603050405020304" pitchFamily="18" charset="0"/>
-              <a:ea typeface="Times New Roman" panose="02020603050405020304" pitchFamily="18" charset="0"/>
-            </a:endParaRPr>
-          </a:p>
-          <a:p>
-            <a:pPr marL="0" marR="0">
-              <a:spcBef>
-                <a:spcPts val="0"/>
-              </a:spcBef>
-              <a:spcAft>
-                <a:spcPts val="0"/>
-              </a:spcAft>
-            </a:pPr>
-            <a:r>
-              <a:rPr lang="en-US" sz="1800" dirty="0">
-                <a:effectLst/>
-                <a:latin typeface="Calibri" panose="020F0502020204030204" pitchFamily="34" charset="0"/>
-                <a:ea typeface="Times New Roman" panose="02020603050405020304" pitchFamily="18" charset="0"/>
-                <a:cs typeface="Times New Roman" panose="02020603050405020304" pitchFamily="18" charset="0"/>
-              </a:rPr>
-              <a:t>Today’s AI music systems can generate beats, melodies, lyrics, vocals, and even release-ready tracks. Tools like </a:t>
-            </a:r>
-            <a:r>
-              <a:rPr lang="en-US" sz="1800" dirty="0" err="1">
-                <a:effectLst/>
-                <a:latin typeface="Calibri" panose="020F0502020204030204" pitchFamily="34" charset="0"/>
-                <a:ea typeface="Times New Roman" panose="02020603050405020304" pitchFamily="18" charset="0"/>
-                <a:cs typeface="Times New Roman" panose="02020603050405020304" pitchFamily="18" charset="0"/>
-              </a:rPr>
-              <a:t>Suno</a:t>
-            </a:r>
-            <a:r>
-              <a:rPr lang="en-US" sz="1800" dirty="0">
-                <a:effectLst/>
-                <a:latin typeface="Calibri" panose="020F0502020204030204" pitchFamily="34" charset="0"/>
-                <a:ea typeface="Times New Roman" panose="02020603050405020304" pitchFamily="18" charset="0"/>
-                <a:cs typeface="Times New Roman" panose="02020603050405020304" pitchFamily="18" charset="0"/>
-              </a:rPr>
-              <a:t> and </a:t>
-            </a:r>
-            <a:r>
-              <a:rPr lang="en-US" sz="1800" dirty="0" err="1">
-                <a:effectLst/>
-                <a:latin typeface="Calibri" panose="020F0502020204030204" pitchFamily="34" charset="0"/>
-                <a:ea typeface="Times New Roman" panose="02020603050405020304" pitchFamily="18" charset="0"/>
-                <a:cs typeface="Times New Roman" panose="02020603050405020304" pitchFamily="18" charset="0"/>
-              </a:rPr>
-              <a:t>Udio</a:t>
-            </a:r>
-            <a:r>
-              <a:rPr lang="en-US" sz="1800" dirty="0">
-                <a:effectLst/>
-                <a:latin typeface="Calibri" panose="020F0502020204030204" pitchFamily="34" charset="0"/>
-                <a:ea typeface="Times New Roman" panose="02020603050405020304" pitchFamily="18" charset="0"/>
-                <a:cs typeface="Times New Roman" panose="02020603050405020304" pitchFamily="18" charset="0"/>
-              </a:rPr>
-              <a:t> have made music creation far more accessible, allowing people with little production experience to create and share songs quickly.</a:t>
-            </a:r>
-            <a:endParaRPr lang="en-US" sz="1800" dirty="0">
-              <a:effectLst/>
-              <a:latin typeface="Times New Roman" panose="02020603050405020304" pitchFamily="18" charset="0"/>
-              <a:ea typeface="Times New Roman" panose="02020603050405020304" pitchFamily="18" charset="0"/>
-            </a:endParaRPr>
-          </a:p>
-          <a:p>
-            <a:pPr marL="0" marR="0">
-              <a:spcBef>
-                <a:spcPts val="0"/>
-              </a:spcBef>
-              <a:spcAft>
-                <a:spcPts val="0"/>
-              </a:spcAft>
-            </a:pPr>
-            <a:r>
-              <a:rPr lang="en-US" sz="1800" dirty="0">
-                <a:effectLst/>
-                <a:latin typeface="Calibri" panose="020F0502020204030204" pitchFamily="34" charset="0"/>
-                <a:ea typeface="Times New Roman" panose="02020603050405020304" pitchFamily="18" charset="0"/>
-                <a:cs typeface="Times New Roman" panose="02020603050405020304" pitchFamily="18" charset="0"/>
-              </a:rPr>
-              <a:t> </a:t>
-            </a:r>
-            <a:endParaRPr lang="en-US" sz="1800" dirty="0">
-              <a:effectLst/>
-              <a:latin typeface="Times New Roman" panose="02020603050405020304" pitchFamily="18" charset="0"/>
-              <a:ea typeface="Times New Roman" panose="02020603050405020304" pitchFamily="18" charset="0"/>
-            </a:endParaRPr>
-          </a:p>
-          <a:p>
-            <a:pPr marL="0" marR="0">
-              <a:spcBef>
-                <a:spcPts val="0"/>
-              </a:spcBef>
-              <a:spcAft>
-                <a:spcPts val="0"/>
-              </a:spcAft>
-            </a:pPr>
-            <a:r>
-              <a:rPr lang="en-US" sz="1800" dirty="0">
-                <a:effectLst/>
-                <a:latin typeface="Calibri" panose="020F0502020204030204" pitchFamily="34" charset="0"/>
-                <a:ea typeface="Times New Roman" panose="02020603050405020304" pitchFamily="18" charset="0"/>
-                <a:cs typeface="Times New Roman" panose="02020603050405020304" pitchFamily="18" charset="0"/>
-              </a:rPr>
-              <a:t>The adoption is growing fast:</a:t>
+              <a:t>The adoption is growing fast. I have some numbers lad out on the screen.</a:t>
             </a:r>
             <a:endParaRPr lang="en-US" sz="1800" dirty="0">
               <a:effectLst/>
@@ -1773,39 +1575,6 @@
               </a:spcAft>
             </a:pPr>
             <a:r>
-              <a:rPr lang="en-US" sz="1800" b="1" dirty="0">
-                <a:effectLst/>
-                <a:latin typeface="Calibri" panose="020F0502020204030204" pitchFamily="34" charset="0"/>
-                <a:ea typeface="Times New Roman" panose="02020603050405020304" pitchFamily="18" charset="0"/>
-                <a:cs typeface="Times New Roman" panose="02020603050405020304" pitchFamily="18" charset="0"/>
-              </a:rPr>
-              <a:t>Suggested duration:</a:t>
-            </a:r>
-            <a:r>
-              <a:rPr lang="en-US" sz="1800" dirty="0">
-                <a:effectLst/>
-                <a:latin typeface="Calibri" panose="020F0502020204030204" pitchFamily="34" charset="0"/>
-                <a:ea typeface="Times New Roman" panose="02020603050405020304" pitchFamily="18" charset="0"/>
-                <a:cs typeface="Times New Roman" panose="02020603050405020304" pitchFamily="18" charset="0"/>
-              </a:rPr>
-              <a:t> 1 minute 15 seconds</a:t>
-            </a:r>
-            <a:endParaRPr lang="en-US" sz="1800" dirty="0">
-              <a:effectLst/>
-              <a:latin typeface="Times New Roman" panose="02020603050405020304" pitchFamily="18" charset="0"/>
-              <a:ea typeface="Times New Roman" panose="02020603050405020304" pitchFamily="18" charset="0"/>
-            </a:endParaRPr>
-          </a:p>
-          <a:p>
-            <a:pPr marL="0" marR="0">
-              <a:spcBef>
-                <a:spcPts val="0"/>
-              </a:spcBef>
-              <a:spcAft>
-                <a:spcPts val="0"/>
-              </a:spcAft>
-            </a:pPr>
-            <a:r>
               <a:rPr lang="en-US" sz="1800" dirty="0">
                 <a:effectLst/>
                 <a:latin typeface="Calibri" panose="020F0502020204030204" pitchFamily="34" charset="0"/>
@@ -2245,22 +2014,13 @@
               </a:spcAft>
             </a:pPr>
             <a:r>
-              <a:rPr lang="en-US" sz="1800" b="1" dirty="0">
-                <a:effectLst/>
-                <a:latin typeface="Calibri" panose="020F0502020204030204" pitchFamily="34" charset="0"/>
-                <a:ea typeface="Times New Roman" panose="02020603050405020304" pitchFamily="18" charset="0"/>
-                <a:cs typeface="Times New Roman" panose="02020603050405020304" pitchFamily="18" charset="0"/>
-              </a:rPr>
-              <a:t>Suggested duration:</a:t>
-            </a:r>
-            <a:r>
               <a:rPr lang="en-US" sz="1800" dirty="0">
                 <a:effectLst/>
                 <a:latin typeface="Calibri" panose="020F0502020204030204" pitchFamily="34" charset="0"/>
                 <a:ea typeface="Times New Roman" panose="02020603050405020304" pitchFamily="18" charset="0"/>
                 <a:cs typeface="Times New Roman" panose="02020603050405020304" pitchFamily="18" charset="0"/>
               </a:rPr>
-              <a:t> 1 minute 20 seconds</a:t>
+              <a:t>Voice cloning is uniquely unsettling because a voice isn't just a production tool; it is deeply tied to identity, reputation, and personal meaning.</a:t>
             </a:r>
             <a:endParaRPr lang="en-US" sz="1800" dirty="0">
               <a:effectLst/>
@@ -2284,7 +2044,7 @@
                 <a:ea typeface="Times New Roman" panose="02020603050405020304" pitchFamily="18" charset="0"/>
                 <a:cs typeface="Times New Roman" panose="02020603050405020304" pitchFamily="18" charset="0"/>
               </a:rPr>
-              <a:t>Voice cloning is uniquely unsettling because a voice isn't just a production tool; it is deeply tied to identity, reputation, and personal meaning.</a:t>
+              <a:t> </a:t>
             </a:r>
             <a:endParaRPr lang="en-US" sz="1800" dirty="0">
               <a:effectLst/>
@@ -2308,31 +2068,7 @@
                 <a:ea typeface="Times New Roman" panose="02020603050405020304" pitchFamily="18" charset="0"/>
                 <a:cs typeface="Times New Roman" panose="02020603050405020304" pitchFamily="18" charset="0"/>
               </a:rPr>
-              <a:t> </a:t>
-            </a:r>
-            <a:endParaRPr lang="en-US" sz="1800" dirty="0">
-              <a:effectLst/>
-              <a:latin typeface="Times New Roman" panose="02020603050405020304" pitchFamily="18" charset="0"/>
-              <a:ea typeface="Times New Roman" panose="02020603050405020304" pitchFamily="18" charset="0"/>
-            </a:endParaRPr>
-          </a:p>
-          <a:p>
-            <a:pPr marL="0" marR="0">
-              <a:spcBef>
-                <a:spcPts val="0"/>
-              </a:spcBef>
-              <a:spcAft>
-                <a:spcPts val="0"/>
-              </a:spcAft>
-            </a:pPr>
-            <a:r>
-              <a:rPr lang="en-US" sz="1800" dirty="0">
-                <a:effectLst/>
-                <a:latin typeface="Calibri" panose="020F0502020204030204" pitchFamily="34" charset="0"/>
-                <a:ea typeface="Times New Roman" panose="02020603050405020304" pitchFamily="18" charset="0"/>
-                <a:cs typeface="Times New Roman" panose="02020603050405020304" pitchFamily="18" charset="0"/>
-              </a:rPr>
-              <a:t>Unlike borrowing a musical style, cloning a voice simulates the actual person. This shifts the issue from cultural discomfort to a serious ethical and legal challenge: a voice being public does not mean it is free to use. Visibility is not consent, and imitating a voice risks appropriating identity itself.</a:t>
+              <a:t>Unlike borrowing a musical style, cloning a voice simulates the actual person. This shifts the issue from cultural discomfort to a serious ethical and legal challenge: a voice being public does not mean it is free to use. Visibility is not consent, and imitating voice risks appropriating identity itself.</a:t>
             </a:r>
             <a:endParaRPr lang="en-US" sz="1800" dirty="0">
               <a:effectLst/>
@@ -2473,39 +2209,6 @@
               </a:spcAft>
             </a:pPr>
             <a:r>
-              <a:rPr lang="en-US" sz="1800" b="1" dirty="0">
-                <a:effectLst/>
-                <a:latin typeface="Calibri" panose="020F0502020204030204" pitchFamily="34" charset="0"/>
-                <a:ea typeface="Times New Roman" panose="02020603050405020304" pitchFamily="18" charset="0"/>
-                <a:cs typeface="Times New Roman" panose="02020603050405020304" pitchFamily="18" charset="0"/>
-              </a:rPr>
-              <a:t>Suggested duration:</a:t>
-            </a:r>
-            <a:r>
-              <a:rPr lang="en-US" sz="1800" dirty="0">
-                <a:effectLst/>
-                <a:latin typeface="Calibri" panose="020F0502020204030204" pitchFamily="34" charset="0"/>
-                <a:ea typeface="Times New Roman" panose="02020603050405020304" pitchFamily="18" charset="0"/>
-                <a:cs typeface="Times New Roman" panose="02020603050405020304" pitchFamily="18" charset="0"/>
-              </a:rPr>
-              <a:t> 1 minute 30 seconds</a:t>
-            </a:r>
-            <a:endParaRPr lang="en-US" sz="1800" dirty="0">
-              <a:effectLst/>
-              <a:latin typeface="Times New Roman" panose="02020603050405020304" pitchFamily="18" charset="0"/>
-              <a:ea typeface="Times New Roman" panose="02020603050405020304" pitchFamily="18" charset="0"/>
-            </a:endParaRPr>
-          </a:p>
-          <a:p>
-            <a:pPr marL="0" marR="0">
-              <a:spcBef>
-                <a:spcPts val="0"/>
-              </a:spcBef>
-              <a:spcAft>
-                <a:spcPts val="0"/>
-              </a:spcAft>
-            </a:pPr>
-            <a:r>
               <a:rPr lang="en-US" sz="1800" dirty="0">
                 <a:effectLst/>
                 <a:latin typeface="Calibri" panose="020F0502020204030204" pitchFamily="34" charset="0"/>
@@ -2792,39 +2495,6 @@
               </a:spcAft>
             </a:pPr>
             <a:r>
-              <a:rPr lang="en-US" sz="1800" b="1" dirty="0">
-                <a:effectLst/>
-                <a:latin typeface="Calibri" panose="020F0502020204030204" pitchFamily="34" charset="0"/>
-                <a:ea typeface="Times New Roman" panose="02020603050405020304" pitchFamily="18" charset="0"/>
-                <a:cs typeface="Times New Roman" panose="02020603050405020304" pitchFamily="18" charset="0"/>
-              </a:rPr>
-              <a:t>Suggested duration:</a:t>
-            </a:r>
-            <a:r>
-              <a:rPr lang="en-US" sz="1800" dirty="0">
-                <a:effectLst/>
-                <a:latin typeface="Calibri" panose="020F0502020204030204" pitchFamily="34" charset="0"/>
-                <a:ea typeface="Times New Roman" panose="02020603050405020304" pitchFamily="18" charset="0"/>
-                <a:cs typeface="Times New Roman" panose="02020603050405020304" pitchFamily="18" charset="0"/>
-              </a:rPr>
-              <a:t> 1 minute 15 seconds</a:t>
-            </a:r>
-            <a:endParaRPr lang="en-US" sz="1800" dirty="0">
-              <a:effectLst/>
-              <a:latin typeface="Times New Roman" panose="02020603050405020304" pitchFamily="18" charset="0"/>
-              <a:ea typeface="Times New Roman" panose="02020603050405020304" pitchFamily="18" charset="0"/>
-            </a:endParaRPr>
-          </a:p>
-          <a:p>
-            <a:pPr marL="0" marR="0">
-              <a:spcBef>
-                <a:spcPts val="0"/>
-              </a:spcBef>
-              <a:spcAft>
-                <a:spcPts val="0"/>
-              </a:spcAft>
-            </a:pPr>
-            <a:r>
               <a:rPr lang="en-US" sz="1800" dirty="0">
                 <a:effectLst/>
                 <a:latin typeface="Calibri" panose="020F0502020204030204" pitchFamily="34" charset="0"/>
@@ -3105,39 +2775,6 @@
               </a:spcAft>
             </a:pPr>
             <a:r>
-              <a:rPr lang="en-US" sz="1800" b="1" dirty="0">
-                <a:effectLst/>
-                <a:latin typeface="Calibri" panose="020F0502020204030204" pitchFamily="34" charset="0"/>
-                <a:ea typeface="Times New Roman" panose="02020603050405020304" pitchFamily="18" charset="0"/>
-                <a:cs typeface="Times New Roman" panose="02020603050405020304" pitchFamily="18" charset="0"/>
-              </a:rPr>
-              <a:t>Suggested duration:</a:t>
-            </a:r>
-            <a:r>
-              <a:rPr lang="en-US" sz="1800" dirty="0">
-                <a:effectLst/>
-                <a:latin typeface="Calibri" panose="020F0502020204030204" pitchFamily="34" charset="0"/>
-                <a:ea typeface="Times New Roman" panose="02020603050405020304" pitchFamily="18" charset="0"/>
-                <a:cs typeface="Times New Roman" panose="02020603050405020304" pitchFamily="18" charset="0"/>
-              </a:rPr>
-              <a:t> 1 minute 30 seconds</a:t>
-            </a:r>
-            <a:endParaRPr lang="en-US" sz="1800" dirty="0">
-              <a:effectLst/>
-              <a:latin typeface="Times New Roman" panose="02020603050405020304" pitchFamily="18" charset="0"/>
-              <a:ea typeface="Times New Roman" panose="02020603050405020304" pitchFamily="18" charset="0"/>
-            </a:endParaRPr>
-          </a:p>
-          <a:p>
-            <a:pPr marL="0" marR="0">
-              <a:spcBef>
-                <a:spcPts val="0"/>
-              </a:spcBef>
-              <a:spcAft>
-                <a:spcPts val="0"/>
-              </a:spcAft>
-            </a:pPr>
-            <a:r>
               <a:rPr lang="en-US" sz="1800" dirty="0">
                 <a:effectLst/>
                 <a:latin typeface="Calibri" panose="020F0502020204030204" pitchFamily="34" charset="0"/>
@@ -3415,7 +3052,7 @@
                 <a:ea typeface="Times New Roman" panose="02020603050405020304" pitchFamily="18" charset="0"/>
                 <a:cs typeface="Times New Roman" panose="02020603050405020304" pitchFamily="18" charset="0"/>
               </a:rPr>
-              <a:t>Suggested duration:</a:t>
+              <a:t>Consent</a:t>
             </a:r>
             <a:r>
               <a:rPr lang="en-US" sz="1800" dirty="0">
@@ -3424,7 +3061,7 @@
                 <a:ea typeface="Times New Roman" panose="02020603050405020304" pitchFamily="18" charset="0"/>
                 <a:cs typeface="Times New Roman" panose="02020603050405020304" pitchFamily="18" charset="0"/>
               </a:rPr>
-              <a:t> 1 minute 10 seconds</a:t>
+              <a:t> is about whether the people whose voices, styles, or creative work shaped the system ever agreed to be part of it. Voice isn’t just another data point or features to analyze, it often carries identity in a very intimate way.</a:t>
             </a:r>
             <a:endParaRPr lang="en-US" sz="1800" dirty="0">
               <a:effectLst/>
@@ -3472,7 +3109,7 @@
                 <a:ea typeface="Times New Roman" panose="02020603050405020304" pitchFamily="18" charset="0"/>
                 <a:cs typeface="Times New Roman" panose="02020603050405020304" pitchFamily="18" charset="0"/>
               </a:rPr>
-              <a:t>Consent</a:t>
+              <a:t>Authorship</a:t>
             </a:r>
             <a:r>
               <a:rPr lang="en-US" sz="1800" dirty="0">
@@ -3481,7 +3118,7 @@
                 <a:ea typeface="Times New Roman" panose="02020603050405020304" pitchFamily="18" charset="0"/>
                 <a:cs typeface="Times New Roman" panose="02020603050405020304" pitchFamily="18" charset="0"/>
               </a:rPr>
-              <a:t> is about whether the people whose voices, styles, or creative work shaped the system ever agreed to be part of it. Voice isn’t just another data point or features to analyze, it often carries identity in a very intimate way.</a:t>
+              <a:t> is about who deserves credit and whether AI blurs that recognition. In hip-hop, authenticity comes from lived experience, integrity, and the bond between artist and audience. AI can imitate credibility without earning it. A convincing performance is not the same as an authentic one. And in rap, that distinction is essential.</a:t>
             </a:r>
             <a:endParaRPr lang="en-US" sz="1800" dirty="0">
               <a:effectLst/>
@@ -3529,7 +3166,7 @@
                 <a:ea typeface="Times New Roman" panose="02020603050405020304" pitchFamily="18" charset="0"/>
                 <a:cs typeface="Times New Roman" panose="02020603050405020304" pitchFamily="18" charset="0"/>
               </a:rPr>
-              <a:t>Authorship</a:t>
+              <a:t>Cultural exploitation</a:t>
             </a:r>
             <a:r>
               <a:rPr lang="en-US" sz="1800" dirty="0">
@@ -3538,64 +3175,7 @@
                 <a:ea typeface="Times New Roman" panose="02020603050405020304" pitchFamily="18" charset="0"/>
                 <a:cs typeface="Times New Roman" panose="02020603050405020304" pitchFamily="18" charset="0"/>
               </a:rPr>
-              <a:t> is about who deserves credit and whether AI blurs that recognition. In hip-hop, authenticity comes from lived experience, credibility, and the bond between artist and audience. AI can imitate authority without earning it, so a convincing performance is not the same as an authentic one—and in rap, that distinction matters.</a:t>
-            </a:r>
-            <a:endParaRPr lang="en-US" sz="1800" dirty="0">
-              <a:effectLst/>
-              <a:latin typeface="Times New Roman" panose="02020603050405020304" pitchFamily="18" charset="0"/>
-              <a:ea typeface="Times New Roman" panose="02020603050405020304" pitchFamily="18" charset="0"/>
-            </a:endParaRPr>
-          </a:p>
-          <a:p>
-            <a:pPr marL="0" marR="0">
-              <a:spcBef>
-                <a:spcPts val="0"/>
-              </a:spcBef>
-              <a:spcAft>
-                <a:spcPts val="0"/>
-              </a:spcAft>
-            </a:pPr>
-            <a:r>
-              <a:rPr lang="en-US" sz="1800" dirty="0">
-                <a:effectLst/>
-                <a:latin typeface="Calibri" panose="020F0502020204030204" pitchFamily="34" charset="0"/>
-                <a:ea typeface="Times New Roman" panose="02020603050405020304" pitchFamily="18" charset="0"/>
-                <a:cs typeface="Times New Roman" panose="02020603050405020304" pitchFamily="18" charset="0"/>
-              </a:rPr>
-              <a:t> </a:t>
-            </a:r>
-            <a:endParaRPr lang="en-US" sz="1800" dirty="0">
-              <a:effectLst/>
-              <a:latin typeface="Times New Roman" panose="02020603050405020304" pitchFamily="18" charset="0"/>
-              <a:ea typeface="Times New Roman" panose="02020603050405020304" pitchFamily="18" charset="0"/>
-            </a:endParaRPr>
-          </a:p>
-          <a:p>
-            <a:pPr marL="0" marR="0">
-              <a:spcBef>
-                <a:spcPts val="0"/>
-              </a:spcBef>
-              <a:spcAft>
-                <a:spcPts val="0"/>
-              </a:spcAft>
-            </a:pPr>
-            <a:r>
-              <a:rPr lang="en-US" sz="1800" b="1" dirty="0">
-                <a:effectLst/>
-                <a:latin typeface="Calibri" panose="020F0502020204030204" pitchFamily="34" charset="0"/>
-                <a:ea typeface="Times New Roman" panose="02020603050405020304" pitchFamily="18" charset="0"/>
-                <a:cs typeface="Times New Roman" panose="02020603050405020304" pitchFamily="18" charset="0"/>
-              </a:rPr>
-              <a:t>Cultural exploitation</a:t>
-            </a:r>
-            <a:r>
-              <a:rPr lang="en-US" sz="1800" dirty="0">
-                <a:effectLst/>
-                <a:latin typeface="Calibri" panose="020F0502020204030204" pitchFamily="34" charset="0"/>
-                <a:ea typeface="Times New Roman" panose="02020603050405020304" pitchFamily="18" charset="0"/>
-                <a:cs typeface="Times New Roman" panose="02020603050405020304" pitchFamily="18" charset="0"/>
-              </a:rPr>
-              <a:t> asks whether communities are being used without consent, credit, or compensation. If AI is trained on Black cultural expression without context or recognition, it risks repeating patterns of extraction. Training data choices are ultimately questions of fairness, representation, and power</a:t>
+              <a:t> asks whether communities are being used without consent, credit, or compensation. If AI is trained on Black cultural expression without context or recognition, it risks repeating patterns of extraction. Training data choices are ultimately questions of fairness, representation, and power.</a:t>
             </a:r>
             <a:endParaRPr lang="en-US" sz="1800" dirty="0">
               <a:effectLst/>
@@ -3782,22 +3362,13 @@
               </a:spcAft>
             </a:pPr>
             <a:r>
-              <a:rPr lang="en-US" sz="1800" b="1" dirty="0">
-                <a:effectLst/>
-                <a:latin typeface="Calibri" panose="020F0502020204030204" pitchFamily="34" charset="0"/>
-                <a:ea typeface="Times New Roman" panose="02020603050405020304" pitchFamily="18" charset="0"/>
-                <a:cs typeface="Times New Roman" panose="02020603050405020304" pitchFamily="18" charset="0"/>
-              </a:rPr>
-              <a:t>Suggested duration:</a:t>
-            </a:r>
-            <a:r>
               <a:rPr lang="en-US" sz="1800" dirty="0">
                 <a:effectLst/>
                 <a:latin typeface="Calibri" panose="020F0502020204030204" pitchFamily="34" charset="0"/>
                 <a:ea typeface="Times New Roman" panose="02020603050405020304" pitchFamily="18" charset="0"/>
                 <a:cs typeface="Times New Roman" panose="02020603050405020304" pitchFamily="18" charset="0"/>
               </a:rPr>
-              <a:t> 1 minute 15 seconds</a:t>
+              <a:t>So what does all of this mean for data scientists?</a:t>
             </a:r>
             <a:endParaRPr lang="en-US" sz="1800" dirty="0">
               <a:effectLst/>
@@ -3821,7 +3392,7 @@
                 <a:ea typeface="Times New Roman" panose="02020603050405020304" pitchFamily="18" charset="0"/>
                 <a:cs typeface="Times New Roman" panose="02020603050405020304" pitchFamily="18" charset="0"/>
               </a:rPr>
-              <a:t>So what does all of this mean for data scientists?</a:t>
+              <a:t> </a:t>
             </a:r>
             <a:endParaRPr lang="en-US" sz="1800" dirty="0">
               <a:effectLst/>
@@ -3845,31 +3416,7 @@
                 <a:ea typeface="Times New Roman" panose="02020603050405020304" pitchFamily="18" charset="0"/>
                 <a:cs typeface="Times New Roman" panose="02020603050405020304" pitchFamily="18" charset="0"/>
               </a:rPr>
-              <a:t> </a:t>
-            </a:r>
-            <a:endParaRPr lang="en-US" sz="1800" dirty="0">
-              <a:effectLst/>
-              <a:latin typeface="Times New Roman" panose="02020603050405020304" pitchFamily="18" charset="0"/>
-              <a:ea typeface="Times New Roman" panose="02020603050405020304" pitchFamily="18" charset="0"/>
-            </a:endParaRPr>
-          </a:p>
-          <a:p>
-            <a:pPr marL="0" marR="0">
-              <a:spcBef>
-                <a:spcPts val="0"/>
-              </a:spcBef>
-              <a:spcAft>
-                <a:spcPts val="0"/>
-              </a:spcAft>
-            </a:pPr>
-            <a:r>
-              <a:rPr lang="en-US" sz="1800" dirty="0">
-                <a:effectLst/>
-                <a:latin typeface="Calibri" panose="020F0502020204030204" pitchFamily="34" charset="0"/>
-                <a:ea typeface="Times New Roman" panose="02020603050405020304" pitchFamily="18" charset="0"/>
-                <a:cs typeface="Times New Roman" panose="02020603050405020304" pitchFamily="18" charset="0"/>
-              </a:rPr>
-              <a:t>Many of us will go on to build recommender systems, generative AI tools, media platforms, policy-facing applications, or decision-support systems. And even if we never work directly in music, the same ethical issues are going to show up in other domains.</a:t>
+              <a:t>Many of us will go on to build generative AI tools, media platforms, policy-facing applications, or decision-support systems. And even if we never work directly in music, the same ethical issues are going to show up in other domains.</a:t>
             </a:r>
             <a:endParaRPr lang="en-US" sz="1800" dirty="0">
               <a:effectLst/>
@@ -3999,39 +3546,6 @@
               </a:spcAft>
             </a:pPr>
             <a:r>
-              <a:rPr lang="en-US" sz="1800" b="1" dirty="0">
-                <a:effectLst/>
-                <a:latin typeface="Calibri" panose="020F0502020204030204" pitchFamily="34" charset="0"/>
-                <a:ea typeface="Times New Roman" panose="02020603050405020304" pitchFamily="18" charset="0"/>
-                <a:cs typeface="Times New Roman" panose="02020603050405020304" pitchFamily="18" charset="0"/>
-              </a:rPr>
-              <a:t>Suggested duration:</a:t>
-            </a:r>
-            <a:r>
-              <a:rPr lang="en-US" sz="1800" dirty="0">
-                <a:effectLst/>
-                <a:latin typeface="Calibri" panose="020F0502020204030204" pitchFamily="34" charset="0"/>
-                <a:ea typeface="Times New Roman" panose="02020603050405020304" pitchFamily="18" charset="0"/>
-                <a:cs typeface="Times New Roman" panose="02020603050405020304" pitchFamily="18" charset="0"/>
-              </a:rPr>
-              <a:t> 1 minute 25 seconds</a:t>
-            </a:r>
-            <a:endParaRPr lang="en-US" sz="1800" dirty="0">
-              <a:effectLst/>
-              <a:latin typeface="Times New Roman" panose="02020603050405020304" pitchFamily="18" charset="0"/>
-              <a:ea typeface="Times New Roman" panose="02020603050405020304" pitchFamily="18" charset="0"/>
-            </a:endParaRPr>
-          </a:p>
-          <a:p>
-            <a:pPr marL="0" marR="0">
-              <a:spcBef>
-                <a:spcPts val="0"/>
-              </a:spcBef>
-              <a:spcAft>
-                <a:spcPts val="0"/>
-              </a:spcAft>
-            </a:pPr>
-            <a:r>
               <a:rPr lang="en-US" sz="1800" dirty="0">
                 <a:effectLst/>
                 <a:latin typeface="Calibri" panose="020F0502020204030204" pitchFamily="34" charset="0"/>
@@ -4375,7 +3889,7 @@
                 <a:ea typeface="Times New Roman" panose="02020603050405020304" pitchFamily="18" charset="0"/>
                 <a:cs typeface="Times New Roman" panose="02020603050405020304" pitchFamily="18" charset="0"/>
               </a:rPr>
-              <a:t>I don’t think this presentation leads to a neat yes/no answer, and I don’t think that it should. The point is not to force certainty where the issue is very complex.</a:t>
+              <a:t>I don’t think this presentation leads to a neat yes/no answer. And I don’t think that it should. The point is not to force certainty where the issue is very complex.</a:t>
             </a:r>
             <a:endParaRPr lang="en-US" sz="1800" dirty="0">
               <a:effectLst/>
@@ -4399,7 +3913,7 @@
                 <a:ea typeface="Times New Roman" panose="02020603050405020304" pitchFamily="18" charset="0"/>
                 <a:cs typeface="Times New Roman" panose="02020603050405020304" pitchFamily="18" charset="0"/>
               </a:rPr>
-              <a:t>What I do think is clear is that the answer will depend on design choices, legal structures, and cultural values. And those things do not emerge on their own. People build them. People enforce them. People normalize them.</a:t>
+              <a:t>What clear for me is that the answer will depend on design choices, legal structures, and cultural values. Those things do not emerge on their own. People build them. People enforce them. People normalize them.</a:t>
             </a:r>
             <a:endParaRPr lang="en-US" sz="1800" dirty="0">
               <a:effectLst/>
@@ -4465,15 +3979,15 @@
               </a:spcAft>
             </a:pPr>
             <a:r>
-              <a:rPr lang="en-US" sz="1800" dirty="0">
+              <a:rPr lang="en-US" sz="1800">
                 <a:effectLst/>
                 <a:latin typeface="Calibri" panose="020F0502020204030204" pitchFamily="34" charset="0"/>
                 <a:ea typeface="Times New Roman" panose="02020603050405020304" pitchFamily="18" charset="0"/>
                 <a:cs typeface="Times New Roman" panose="02020603050405020304" pitchFamily="18" charset="0"/>
               </a:rPr>
-              <a:t>To quote the leader of the free world: “Thank you for your attention to this matter”.</a:t>
-            </a:r>
-            <a:endParaRPr lang="en-US" sz="1800" dirty="0">
+              <a:t>Folks, to quote the leader of the free world: “Thank you for your attention to this matter”.</a:t>
+            </a:r>
+            <a:endParaRPr lang="en-US" sz="1800">
               <a:effectLst/>
               <a:latin typeface="Times New Roman" panose="02020603050405020304" pitchFamily="18" charset="0"/>
               <a:ea typeface="Times New Roman" panose="02020603050405020304" pitchFamily="18" charset="0"/>
@@ -4601,22 +4115,13 @@
               </a:spcAft>
             </a:pPr>
             <a:r>
-              <a:rPr lang="en-US" sz="1800" b="1" dirty="0">
-                <a:effectLst/>
-                <a:latin typeface="Calibri" panose="020F0502020204030204" pitchFamily="34" charset="0"/>
-                <a:ea typeface="Times New Roman" panose="02020603050405020304" pitchFamily="18" charset="0"/>
-                <a:cs typeface="Times New Roman" panose="02020603050405020304" pitchFamily="18" charset="0"/>
-              </a:rPr>
-              <a:t>Proposed time:</a:t>
-            </a:r>
-            <a:r>
               <a:rPr lang="en-US" sz="1800" dirty="0">
                 <a:effectLst/>
                 <a:latin typeface="Calibri" panose="020F0502020204030204" pitchFamily="34" charset="0"/>
                 <a:ea typeface="Times New Roman" panose="02020603050405020304" pitchFamily="18" charset="0"/>
                 <a:cs typeface="Times New Roman" panose="02020603050405020304" pitchFamily="18" charset="0"/>
               </a:rPr>
-              <a:t> 45 seconds</a:t>
+              <a:t>The following are the topics we will be covering today:</a:t>
             </a:r>
             <a:endParaRPr lang="en-US" sz="1800" dirty="0">
               <a:effectLst/>
@@ -4625,13 +4130,41 @@
             </a:endParaRPr>
           </a:p>
           <a:p>
-            <a:pPr marL="0" marR="0">
+            <a:pPr marL="342900" marR="0" lvl="0" indent="-342900">
+              <a:spcBef>
+                <a:spcPts val="0"/>
+              </a:spcBef>
+              <a:spcAft>
+                <a:spcPts val="600"/>
+              </a:spcAft>
+              <a:buFont typeface="Symbol" panose="05050102010706020507" pitchFamily="18" charset="2"/>
+              <a:buChar char=""/>
+            </a:pPr>
+            <a:r>
+              <a:rPr lang="en-US" sz="1800" dirty="0">
+                <a:effectLst/>
+                <a:latin typeface="Calibri" panose="020F0502020204030204" pitchFamily="34" charset="0"/>
+                <a:ea typeface="Times New Roman" panose="02020603050405020304" pitchFamily="18" charset="0"/>
+                <a:cs typeface="Times New Roman" panose="02020603050405020304" pitchFamily="18" charset="0"/>
+              </a:rPr>
+              <a:t>The reasons we chose hip-hop as a case study</a:t>
+            </a:r>
+            <a:endParaRPr lang="en-US" sz="1800" dirty="0">
+              <a:effectLst/>
+              <a:latin typeface="Times New Roman" panose="02020603050405020304" pitchFamily="18" charset="0"/>
+              <a:ea typeface="Times New Roman" panose="02020603050405020304" pitchFamily="18" charset="0"/>
+            </a:endParaRPr>
+          </a:p>
+          <a:p>
+            <a:pPr marL="342900" marR="0" lvl="0" indent="-342900">
               <a:spcBef>
                 <a:spcPts val="0"/>
               </a:spcBef>
               <a:spcAft>
                 <a:spcPts val="0"/>
               </a:spcAft>
+              <a:buFont typeface="Symbol" panose="05050102010706020507" pitchFamily="18" charset="2"/>
+              <a:buChar char=""/>
             </a:pPr>
             <a:r>
               <a:rPr lang="en-US" sz="1800" dirty="0">
@@ -4640,7 +4173,7 @@
                 <a:ea typeface="Times New Roman" panose="02020603050405020304" pitchFamily="18" charset="0"/>
                 <a:cs typeface="Times New Roman" panose="02020603050405020304" pitchFamily="18" charset="0"/>
               </a:rPr>
-              <a:t>These are the topics we will be covering:</a:t>
+              <a:t>The current capabilities of AI in music today</a:t>
             </a:r>
             <a:endParaRPr lang="en-US" sz="1800" dirty="0">
               <a:effectLst/>
@@ -4649,13 +4182,15 @@
             </a:endParaRPr>
           </a:p>
           <a:p>
-            <a:pPr marL="0" marR="0">
+            <a:pPr marL="342900" marR="0" lvl="0" indent="-342900">
               <a:spcBef>
                 <a:spcPts val="0"/>
               </a:spcBef>
               <a:spcAft>
                 <a:spcPts val="0"/>
               </a:spcAft>
+              <a:buFont typeface="Symbol" panose="05050102010706020507" pitchFamily="18" charset="2"/>
+              <a:buChar char=""/>
             </a:pPr>
             <a:r>
               <a:rPr lang="en-US" sz="1800" dirty="0">
@@ -4664,7 +4199,7 @@
                 <a:ea typeface="Times New Roman" panose="02020603050405020304" pitchFamily="18" charset="0"/>
                 <a:cs typeface="Times New Roman" panose="02020603050405020304" pitchFamily="18" charset="0"/>
               </a:rPr>
-              <a:t>First, I will explain why hip-hop is such a useful lens for this conversation. </a:t>
+              <a:t>The Ethics of AI in music creation</a:t>
             </a:r>
             <a:endParaRPr lang="en-US" sz="1800" dirty="0">
               <a:effectLst/>
@@ -4673,13 +4208,15 @@
             </a:endParaRPr>
           </a:p>
           <a:p>
-            <a:pPr marL="0" marR="0">
+            <a:pPr marL="342900" marR="0" lvl="0" indent="-342900">
               <a:spcBef>
                 <a:spcPts val="0"/>
               </a:spcBef>
               <a:spcAft>
                 <a:spcPts val="0"/>
               </a:spcAft>
+              <a:buFont typeface="Symbol" panose="05050102010706020507" pitchFamily="18" charset="2"/>
+              <a:buChar char=""/>
             </a:pPr>
             <a:r>
               <a:rPr lang="en-US" sz="1800" dirty="0">
@@ -4688,7 +4225,7 @@
                 <a:ea typeface="Times New Roman" panose="02020603050405020304" pitchFamily="18" charset="0"/>
                 <a:cs typeface="Times New Roman" panose="02020603050405020304" pitchFamily="18" charset="0"/>
               </a:rPr>
-              <a:t>Then I will take a brief look backward and show that debates about technology and authenticity in music are not new. </a:t>
+              <a:t>The precedents and technology</a:t>
             </a:r>
             <a:endParaRPr lang="en-US" sz="1800" dirty="0">
               <a:effectLst/>
@@ -4697,13 +4234,15 @@
             </a:endParaRPr>
           </a:p>
           <a:p>
-            <a:pPr marL="0" marR="0">
+            <a:pPr marL="342900" marR="0" lvl="0" indent="-342900">
               <a:spcBef>
                 <a:spcPts val="0"/>
               </a:spcBef>
               <a:spcAft>
                 <a:spcPts val="0"/>
               </a:spcAft>
+              <a:buFont typeface="Symbol" panose="05050102010706020507" pitchFamily="18" charset="2"/>
+              <a:buChar char=""/>
             </a:pPr>
             <a:r>
               <a:rPr lang="en-US" sz="1800" dirty="0">
@@ -4712,7 +4251,7 @@
                 <a:ea typeface="Times New Roman" panose="02020603050405020304" pitchFamily="18" charset="0"/>
                 <a:cs typeface="Times New Roman" panose="02020603050405020304" pitchFamily="18" charset="0"/>
               </a:rPr>
-              <a:t>Next, I will explore what AI music systems can do now, especially as it pertains to voice generation and voice cloning.</a:t>
+              <a:t>The specific case of Voice Cloning</a:t>
             </a:r>
             <a:endParaRPr lang="en-US" sz="1800" dirty="0">
               <a:effectLst/>
@@ -4721,13 +4260,15 @@
             </a:endParaRPr>
           </a:p>
           <a:p>
-            <a:pPr marL="0" marR="0">
+            <a:pPr marL="342900" marR="0" lvl="0" indent="-342900">
               <a:spcBef>
                 <a:spcPts val="0"/>
               </a:spcBef>
               <a:spcAft>
                 <a:spcPts val="0"/>
               </a:spcAft>
+              <a:buFont typeface="Symbol" panose="05050102010706020507" pitchFamily="18" charset="2"/>
+              <a:buChar char=""/>
             </a:pPr>
             <a:r>
               <a:rPr lang="en-US" sz="1800" dirty="0">
@@ -4736,7 +4277,7 @@
                 <a:ea typeface="Times New Roman" panose="02020603050405020304" pitchFamily="18" charset="0"/>
                 <a:cs typeface="Times New Roman" panose="02020603050405020304" pitchFamily="18" charset="0"/>
               </a:rPr>
-              <a:t>From there, I will talk about the legal and ethical implications, and I will close by connecting all of this directly to your role as MSDS students.</a:t>
+              <a:t>And the Data Science implications of it all</a:t>
             </a:r>
             <a:endParaRPr lang="en-US" sz="1800" dirty="0">
               <a:effectLst/>
@@ -4750,31 +4291,7 @@
                 <a:spcPts val="0"/>
               </a:spcBef>
               <a:spcAft>
-                <a:spcPts val="0"/>
-              </a:spcAft>
-            </a:pPr>
-            <a:r>
-              <a:rPr lang="en-US" sz="1800" dirty="0">
-                <a:effectLst/>
-                <a:latin typeface="Calibri" panose="020F0502020204030204" pitchFamily="34" charset="0"/>
-                <a:ea typeface="Times New Roman" panose="02020603050405020304" pitchFamily="18" charset="0"/>
-                <a:cs typeface="Times New Roman" panose="02020603050405020304" pitchFamily="18" charset="0"/>
-              </a:rPr>
-              <a:t> </a:t>
-            </a:r>
-            <a:endParaRPr lang="en-US" sz="1800" dirty="0">
-              <a:effectLst/>
-              <a:latin typeface="Times New Roman" panose="02020603050405020304" pitchFamily="18" charset="0"/>
-              <a:ea typeface="Times New Roman" panose="02020603050405020304" pitchFamily="18" charset="0"/>
-            </a:endParaRPr>
-          </a:p>
-          <a:p>
-            <a:pPr marL="0" marR="0">
-              <a:spcBef>
-                <a:spcPts val="0"/>
-              </a:spcBef>
-              <a:spcAft>
-                <a:spcPts val="0"/>
+                <a:spcPts val="600"/>
               </a:spcAft>
             </a:pPr>
             <a:r>
@@ -4914,22 +4431,13 @@
               </a:spcAft>
             </a:pPr>
             <a:r>
-              <a:rPr lang="en-US" sz="1800" b="1" dirty="0">
-                <a:effectLst/>
-                <a:latin typeface="Calibri" panose="020F0502020204030204" pitchFamily="34" charset="0"/>
-                <a:ea typeface="Times New Roman" panose="02020603050405020304" pitchFamily="18" charset="0"/>
-                <a:cs typeface="Times New Roman" panose="02020603050405020304" pitchFamily="18" charset="0"/>
-              </a:rPr>
-              <a:t>Suggested duration:</a:t>
-            </a:r>
-            <a:r>
               <a:rPr lang="en-US" sz="1800" dirty="0">
                 <a:effectLst/>
                 <a:latin typeface="Calibri" panose="020F0502020204030204" pitchFamily="34" charset="0"/>
                 <a:ea typeface="Times New Roman" panose="02020603050405020304" pitchFamily="18" charset="0"/>
                 <a:cs typeface="Times New Roman" panose="02020603050405020304" pitchFamily="18" charset="0"/>
               </a:rPr>
-              <a:t> 1 minute 10 seconds</a:t>
+              <a:t>So why hip-hop?</a:t>
             </a:r>
             <a:endParaRPr lang="en-US" sz="1800" dirty="0">
               <a:effectLst/>
@@ -4953,7 +4461,7 @@
                 <a:ea typeface="Times New Roman" panose="02020603050405020304" pitchFamily="18" charset="0"/>
                 <a:cs typeface="Times New Roman" panose="02020603050405020304" pitchFamily="18" charset="0"/>
               </a:rPr>
-              <a:t>So why hip-hop?</a:t>
+              <a:t>First of all, it is very personal. </a:t>
             </a:r>
             <a:endParaRPr lang="en-US" sz="1800" dirty="0">
               <a:effectLst/>
@@ -4977,7 +4485,7 @@
                 <a:ea typeface="Times New Roman" panose="02020603050405020304" pitchFamily="18" charset="0"/>
                 <a:cs typeface="Times New Roman" panose="02020603050405020304" pitchFamily="18" charset="0"/>
               </a:rPr>
-              <a:t>First of all, it is very personal. </a:t>
+              <a:t>Even though I grew up in Africa, Hip-hop was very central to my formative years. And I completely adhered to its ethos. I found it all very alluring/fascinating. Not so coincidentally Jay-Z is my favorite artist. I’ll spare you the details.</a:t>
             </a:r>
             <a:endParaRPr lang="en-US" sz="1800" dirty="0">
               <a:effectLst/>
@@ -5001,7 +4509,7 @@
                 <a:ea typeface="Times New Roman" panose="02020603050405020304" pitchFamily="18" charset="0"/>
                 <a:cs typeface="Times New Roman" panose="02020603050405020304" pitchFamily="18" charset="0"/>
               </a:rPr>
-              <a:t>Even though I grew up in Africa, Hip-hop was very central to my formative years. And I completely adhered to its ethos. I found it all very alluring/fascinating. Not so coincidentally Jay-Z is my favorite artist. I’ll spare you the details.</a:t>
+              <a:t> </a:t>
             </a:r>
             <a:endParaRPr lang="en-US" sz="1800" dirty="0">
               <a:effectLst/>
@@ -5025,7 +4533,7 @@
                 <a:ea typeface="Times New Roman" panose="02020603050405020304" pitchFamily="18" charset="0"/>
                 <a:cs typeface="Times New Roman" panose="02020603050405020304" pitchFamily="18" charset="0"/>
               </a:rPr>
-              <a:t> </a:t>
+              <a:t>Hip-hop is especially useful because it’s always held two commitments at the same time. </a:t>
             </a:r>
             <a:endParaRPr lang="en-US" sz="1800" dirty="0">
               <a:effectLst/>
@@ -5049,7 +4557,7 @@
                 <a:ea typeface="Times New Roman" panose="02020603050405020304" pitchFamily="18" charset="0"/>
                 <a:cs typeface="Times New Roman" panose="02020603050405020304" pitchFamily="18" charset="0"/>
               </a:rPr>
-              <a:t>Hip-hop is especially useful because it’s always held two commitments at the same time. </a:t>
+              <a:t>On one hand, it has a history of experimentation. It has embraced turntables, drum machines, samplers, digital production tools, Auto-Tune, and platform culture. </a:t>
             </a:r>
             <a:endParaRPr lang="en-US" sz="1800" dirty="0">
               <a:effectLst/>
@@ -5073,7 +4581,7 @@
                 <a:ea typeface="Times New Roman" panose="02020603050405020304" pitchFamily="18" charset="0"/>
                 <a:cs typeface="Times New Roman" panose="02020603050405020304" pitchFamily="18" charset="0"/>
               </a:rPr>
-              <a:t>On one hand, it has a history of experimentation. It has embraced turntables, drum machines, samplers, digital production tools, Auto-Tune, and platform culture. </a:t>
+              <a:t> </a:t>
             </a:r>
             <a:endParaRPr lang="en-US" sz="1800" dirty="0">
               <a:effectLst/>
@@ -5097,7 +4605,7 @@
                 <a:ea typeface="Times New Roman" panose="02020603050405020304" pitchFamily="18" charset="0"/>
                 <a:cs typeface="Times New Roman" panose="02020603050405020304" pitchFamily="18" charset="0"/>
               </a:rPr>
-              <a:t> </a:t>
+              <a:t>On the other, hip-hop has always placed a strong value on originality, authenticity, and earning credibility. In this culture, authorship is about much more than legal ownership. It is about identity and meaning. People care about who is speaking, what experiences they bring, how they sound, and whether that voice feels genuine and earned.</a:t>
             </a:r>
             <a:endParaRPr lang="en-US" sz="1800" dirty="0">
               <a:effectLst/>
@@ -5121,7 +4629,7 @@
                 <a:ea typeface="Times New Roman" panose="02020603050405020304" pitchFamily="18" charset="0"/>
                 <a:cs typeface="Times New Roman" panose="02020603050405020304" pitchFamily="18" charset="0"/>
               </a:rPr>
-              <a:t>On the other, hip-hop has always placed a strong value on originality, authenticity, and earning credibility. In this culture, authorship is about much more than legal ownership. It is about identity and meaning. People care about who is speaking, what experiences they bring, how they sound, and whether that voice feels genuine and earned.</a:t>
+              <a:t> </a:t>
             </a:r>
             <a:endParaRPr lang="en-US" sz="1800" dirty="0">
               <a:effectLst/>
@@ -5145,31 +4653,7 @@
                 <a:ea typeface="Times New Roman" panose="02020603050405020304" pitchFamily="18" charset="0"/>
                 <a:cs typeface="Times New Roman" panose="02020603050405020304" pitchFamily="18" charset="0"/>
               </a:rPr>
-              <a:t> </a:t>
-            </a:r>
-            <a:endParaRPr lang="en-US" sz="1800" dirty="0">
-              <a:effectLst/>
-              <a:latin typeface="Times New Roman" panose="02020603050405020304" pitchFamily="18" charset="0"/>
-              <a:ea typeface="Times New Roman" panose="02020603050405020304" pitchFamily="18" charset="0"/>
-            </a:endParaRPr>
-          </a:p>
-          <a:p>
-            <a:pPr marL="0" marR="0">
-              <a:spcBef>
-                <a:spcPts val="0"/>
-              </a:spcBef>
-              <a:spcAft>
-                <a:spcPts val="0"/>
-              </a:spcAft>
-            </a:pPr>
-            <a:r>
-              <a:rPr lang="en-US" sz="1800" dirty="0">
-                <a:effectLst/>
-                <a:latin typeface="Calibri" panose="020F0502020204030204" pitchFamily="34" charset="0"/>
-                <a:ea typeface="Times New Roman" panose="02020603050405020304" pitchFamily="18" charset="0"/>
-                <a:cs typeface="Times New Roman" panose="02020603050405020304" pitchFamily="18" charset="0"/>
-              </a:rPr>
-              <a:t>Influence vs. Imitation: That is exactly why it is such a useful ethical test case for AI.</a:t>
+              <a:t>This duality makes it a useful ethical test case for AI.</a:t>
             </a:r>
             <a:endParaRPr lang="en-US" sz="1800" dirty="0">
               <a:effectLst/>
@@ -5299,22 +4783,13 @@
               </a:spcAft>
             </a:pPr>
             <a:r>
-              <a:rPr lang="en-US" sz="1800" b="1" dirty="0">
-                <a:effectLst/>
-                <a:latin typeface="Calibri" panose="020F0502020204030204" pitchFamily="34" charset="0"/>
-                <a:ea typeface="Times New Roman" panose="02020603050405020304" pitchFamily="18" charset="0"/>
-                <a:cs typeface="Times New Roman" panose="02020603050405020304" pitchFamily="18" charset="0"/>
-              </a:rPr>
-              <a:t>Suggested duration:</a:t>
-            </a:r>
-            <a:r>
               <a:rPr lang="en-US" sz="1800" dirty="0">
                 <a:effectLst/>
                 <a:latin typeface="Calibri" panose="020F0502020204030204" pitchFamily="34" charset="0"/>
                 <a:ea typeface="Times New Roman" panose="02020603050405020304" pitchFamily="18" charset="0"/>
                 <a:cs typeface="Times New Roman" panose="02020603050405020304" pitchFamily="18" charset="0"/>
               </a:rPr>
-              <a:t> 1 minute 15 seconds</a:t>
+              <a:t>Hip-hop has never existed in isolation. Influence has always been part of the culture. Artists study earlier records, borrow flows, sample classics, and remix newer sounds. That’s normal. But there’s a difference between influence and imitation or “biting,” as hip-hop heads call it.</a:t>
             </a:r>
             <a:endParaRPr lang="en-US" sz="1800" dirty="0">
               <a:effectLst/>
@@ -5338,7 +4813,7 @@
                 <a:ea typeface="Times New Roman" panose="02020603050405020304" pitchFamily="18" charset="0"/>
                 <a:cs typeface="Times New Roman" panose="02020603050405020304" pitchFamily="18" charset="0"/>
               </a:rPr>
-              <a:t>To understand the AI issue, we need to understand hip-hop’s authenticity standard.</a:t>
+              <a:t> </a:t>
             </a:r>
             <a:endParaRPr lang="en-US" sz="1800" dirty="0">
               <a:effectLst/>
@@ -5362,7 +4837,7 @@
                 <a:ea typeface="Times New Roman" panose="02020603050405020304" pitchFamily="18" charset="0"/>
                 <a:cs typeface="Times New Roman" panose="02020603050405020304" pitchFamily="18" charset="0"/>
               </a:rPr>
-              <a:t>Hip-hop has never demanded total isolation from prior influence. In fact, influence is everywhere in music. Artists borrow flows, study earlier records. They build on traditions. They sample older records. The remix contemporary ones. That part is normal. But there is still a difference between influence and imitation or outright copying. Or “biting” as the afficionados call it. Even style-jacking.</a:t>
+              <a:t>Influence means taking inspiration and transforming it through your own perspective and experience. Imitation feels more like wearing someone else’s identity. It might sound impressive, but it can also feel hollow. Hip-hop places a premium on originality. Freestyling is celebrated, battle rap legends are built on quick wit, and there are countless stories of emcees creating incredible verses in minutes. The pen is sacred.</a:t>
             </a:r>
             <a:endParaRPr lang="en-US" sz="1800" dirty="0">
               <a:effectLst/>
@@ -5410,25 +4885,7 @@
                 <a:ea typeface="Times New Roman" panose="02020603050405020304" pitchFamily="18" charset="0"/>
                 <a:cs typeface="Times New Roman" panose="02020603050405020304" pitchFamily="18" charset="0"/>
               </a:rPr>
-              <a:t>Influence means taking something in and transforming it through your own craft, perspective, and experience. Imitation, by contrast, feels like wearing someone else’s identity too closely. It may sound impressive, but it can also feel empty. </a:t>
-            </a:r>
-            <a:r>
-              <a:rPr lang="en-US" sz="1800" dirty="0" err="1">
-                <a:effectLst/>
-                <a:latin typeface="Calibri" panose="020F0502020204030204" pitchFamily="34" charset="0"/>
-                <a:ea typeface="Times New Roman" panose="02020603050405020304" pitchFamily="18" charset="0"/>
-                <a:cs typeface="Times New Roman" panose="02020603050405020304" pitchFamily="18" charset="0"/>
-              </a:rPr>
-              <a:t>Hiphop</a:t>
-            </a:r>
-            <a:r>
-              <a:rPr lang="en-US" sz="1800" dirty="0">
-                <a:effectLst/>
-                <a:latin typeface="Calibri" panose="020F0502020204030204" pitchFamily="34" charset="0"/>
-                <a:ea typeface="Times New Roman" panose="02020603050405020304" pitchFamily="18" charset="0"/>
-                <a:cs typeface="Times New Roman" panose="02020603050405020304" pitchFamily="18" charset="0"/>
-              </a:rPr>
-              <a:t> demands originality. A premium is placed on the ability to free-style. Legends are built on iconic battle-rappers who can make things out about their opponents on the fly and make it rhyme. There are jaw dropping stories about emcees who get in the booth and come up with amazing verses in matter of minutes. The penmanship is sacred.</a:t>
+              <a:t>Now AI can produce songs that seem original on the surface, even though they’re built from patterns learned from earlier works. The concern isn’t simply that AI helps people create. It’s that polished outputs could gradually flatten the cultural uniqueness that gives hip-hop its meaning.</a:t>
             </a:r>
             <a:endParaRPr lang="en-US" sz="1800" dirty="0">
               <a:effectLst/>
@@ -5476,55 +4933,7 @@
                 <a:ea typeface="Times New Roman" panose="02020603050405020304" pitchFamily="18" charset="0"/>
                 <a:cs typeface="Times New Roman" panose="02020603050405020304" pitchFamily="18" charset="0"/>
               </a:rPr>
-              <a:t>Now we have AI that can generate outputs that feel original on the surface while being built from accumulated patterns drawn from earlier works. The concern is not just that AI helps create. The concern is that it may kill cultural uniqueness while still sounding polished.</a:t>
-            </a:r>
-            <a:endParaRPr lang="en-US" sz="1800" dirty="0">
-              <a:effectLst/>
-              <a:latin typeface="Times New Roman" panose="02020603050405020304" pitchFamily="18" charset="0"/>
-              <a:ea typeface="Times New Roman" panose="02020603050405020304" pitchFamily="18" charset="0"/>
-            </a:endParaRPr>
-          </a:p>
-          <a:p>
-            <a:pPr marL="0" marR="0">
-              <a:spcBef>
-                <a:spcPts val="0"/>
-              </a:spcBef>
-              <a:spcAft>
-                <a:spcPts val="0"/>
-              </a:spcAft>
-            </a:pPr>
-            <a:r>
-              <a:rPr lang="en-US" sz="1800" dirty="0">
-                <a:effectLst/>
-                <a:latin typeface="Calibri" panose="020F0502020204030204" pitchFamily="34" charset="0"/>
-                <a:ea typeface="Times New Roman" panose="02020603050405020304" pitchFamily="18" charset="0"/>
-                <a:cs typeface="Times New Roman" panose="02020603050405020304" pitchFamily="18" charset="0"/>
-              </a:rPr>
-              <a:t> </a:t>
-            </a:r>
-            <a:endParaRPr lang="en-US" sz="1800" dirty="0">
-              <a:effectLst/>
-              <a:latin typeface="Times New Roman" panose="02020603050405020304" pitchFamily="18" charset="0"/>
-              <a:ea typeface="Times New Roman" panose="02020603050405020304" pitchFamily="18" charset="0"/>
-            </a:endParaRPr>
-          </a:p>
-          <a:p>
-            <a:pPr marL="0" marR="0">
-              <a:spcBef>
-                <a:spcPts val="0"/>
-              </a:spcBef>
-              <a:spcAft>
-                <a:spcPts val="0"/>
-              </a:spcAft>
-            </a:pPr>
-            <a:r>
-              <a:rPr lang="en-US" sz="1800" dirty="0">
-                <a:effectLst/>
-                <a:latin typeface="Calibri" panose="020F0502020204030204" pitchFamily="34" charset="0"/>
-                <a:ea typeface="Times New Roman" panose="02020603050405020304" pitchFamily="18" charset="0"/>
-                <a:cs typeface="Times New Roman" panose="02020603050405020304" pitchFamily="18" charset="0"/>
-              </a:rPr>
-              <a:t>So, the tension here is real: AI may expand creativity, but it may also dilute the cultural standards that make hip-hop meaningful in the first place.</a:t>
+              <a:t>That’s the real tension: AI may open up new creative possibilities, but it could also weaken the standards of originality and authenticity that have always been central to hip-hop.</a:t>
             </a:r>
             <a:endParaRPr lang="en-US" sz="1800" dirty="0">
               <a:effectLst/>
@@ -5619,6 +5028,34 @@
           <a:p>
             <a:pPr marL="0" marR="0">
               <a:spcBef>
+                <a:spcPts val="600"/>
+              </a:spcBef>
+              <a:spcAft>
+                <a:spcPts val="600"/>
+              </a:spcAft>
+            </a:pPr>
+            <a:r>
+              <a:rPr lang="en-US" sz="1800" b="1" dirty="0">
+                <a:solidFill>
+                  <a:srgbClr val="375375"/>
+                </a:solidFill>
+                <a:effectLst/>
+                <a:latin typeface="Calibri" panose="020F0502020204030204" pitchFamily="34" charset="0"/>
+                <a:cs typeface="Times New Roman" panose="02020603050405020304" pitchFamily="18" charset="0"/>
+              </a:rPr>
+              <a:t>Slide 5. A Personal Entry Point</a:t>
+            </a:r>
+            <a:endParaRPr lang="en-US" sz="1800" b="1" dirty="0">
+              <a:solidFill>
+                <a:srgbClr val="2E74B5"/>
+              </a:solidFill>
+              <a:effectLst/>
+              <a:latin typeface="Times New Roman" panose="02020603050405020304" pitchFamily="18" charset="0"/>
+            </a:endParaRPr>
+          </a:p>
+          <a:p>
+            <a:pPr marL="0" marR="0">
+              <a:spcBef>
                 <a:spcPts val="0"/>
               </a:spcBef>
               <a:spcAft>
@@ -5626,22 +5063,13 @@
               </a:spcAft>
             </a:pPr>
             <a:r>
-              <a:rPr lang="en-US" sz="1800" b="1" dirty="0">
-                <a:effectLst/>
-                <a:latin typeface="Calibri" panose="020F0502020204030204" pitchFamily="34" charset="0"/>
-                <a:ea typeface="Times New Roman" panose="02020603050405020304" pitchFamily="18" charset="0"/>
-                <a:cs typeface="Times New Roman" panose="02020603050405020304" pitchFamily="18" charset="0"/>
-              </a:rPr>
-              <a:t>Proposed time:</a:t>
-            </a:r>
-            <a:r>
               <a:rPr lang="en-US" sz="1800" dirty="0">
                 <a:effectLst/>
                 <a:latin typeface="Calibri" panose="020F0502020204030204" pitchFamily="34" charset="0"/>
                 <a:ea typeface="Times New Roman" panose="02020603050405020304" pitchFamily="18" charset="0"/>
                 <a:cs typeface="Times New Roman" panose="02020603050405020304" pitchFamily="18" charset="0"/>
               </a:rPr>
-              <a:t> 1 minute</a:t>
+              <a:t>What makes this topic personal for me is that I’ve always valued the human element in hip-hop. I used to find the idea of AI-generated rap almost unthinkable, especially in a culture that places so much importance on writing and creating your own work.</a:t>
             </a:r>
             <a:endParaRPr lang="en-US" sz="1800" dirty="0">
               <a:effectLst/>
@@ -5665,7 +5093,7 @@
                 <a:ea typeface="Times New Roman" panose="02020603050405020304" pitchFamily="18" charset="0"/>
                 <a:cs typeface="Times New Roman" panose="02020603050405020304" pitchFamily="18" charset="0"/>
               </a:rPr>
-              <a:t>What makes this topic personal for me is that I’ve always valued the human element in hip-hop. I used to find the idea of AI-generated rap almost unthinkable, especially in a culture that places so much importance on writing and creating your own work.</a:t>
+              <a:t> </a:t>
             </a:r>
             <a:endParaRPr lang="en-US" sz="1800" dirty="0">
               <a:effectLst/>
@@ -5689,7 +5117,7 @@
                 <a:ea typeface="Times New Roman" panose="02020603050405020304" pitchFamily="18" charset="0"/>
                 <a:cs typeface="Times New Roman" panose="02020603050405020304" pitchFamily="18" charset="0"/>
               </a:rPr>
-              <a:t> </a:t>
+              <a:t>Then I came across a version of 50 Cent’s “Many Men” reimagined over a 1950s Motown soul sound. The contrast between the hard lyrics and the church-like instrumentation was striking. And boy did I loved it. That reaction made me uncomfortable because it challenged my instinctive resistance to AI in hip-hop.</a:t>
             </a:r>
             <a:endParaRPr lang="en-US" sz="1800" dirty="0">
               <a:effectLst/>
@@ -5713,7 +5141,7 @@
                 <a:ea typeface="Times New Roman" panose="02020603050405020304" pitchFamily="18" charset="0"/>
                 <a:cs typeface="Times New Roman" panose="02020603050405020304" pitchFamily="18" charset="0"/>
               </a:rPr>
-              <a:t>Then I came across a version of 50 Cent’s “Many Men” reimagined over a 1950s Motown soul sound. The contrast between the hard lyrics and the church-like instrumentation was striking—and I loved it. That reaction made me uncomfortable because it challenged my instinctive resistance to AI in hip-hop.</a:t>
+              <a:t> </a:t>
             </a:r>
             <a:endParaRPr lang="en-US" sz="1800" dirty="0">
               <a:effectLst/>
@@ -5737,31 +5165,7 @@
                 <a:ea typeface="Times New Roman" panose="02020603050405020304" pitchFamily="18" charset="0"/>
                 <a:cs typeface="Times New Roman" panose="02020603050405020304" pitchFamily="18" charset="0"/>
               </a:rPr>
-              <a:t> </a:t>
-            </a:r>
-            <a:endParaRPr lang="en-US" sz="1800" dirty="0">
-              <a:effectLst/>
-              <a:latin typeface="Times New Roman" panose="02020603050405020304" pitchFamily="18" charset="0"/>
-              <a:ea typeface="Times New Roman" panose="02020603050405020304" pitchFamily="18" charset="0"/>
-            </a:endParaRPr>
-          </a:p>
-          <a:p>
-            <a:pPr marL="0" marR="0">
-              <a:spcBef>
-                <a:spcPts val="0"/>
-              </a:spcBef>
-              <a:spcAft>
-                <a:spcPts val="0"/>
-              </a:spcAft>
-            </a:pPr>
-            <a:r>
-              <a:rPr lang="en-US" sz="1800" dirty="0">
-                <a:effectLst/>
-                <a:latin typeface="Calibri" panose="020F0502020204030204" pitchFamily="34" charset="0"/>
-                <a:ea typeface="Times New Roman" panose="02020603050405020304" pitchFamily="18" charset="0"/>
-                <a:cs typeface="Times New Roman" panose="02020603050405020304" pitchFamily="18" charset="0"/>
-              </a:rPr>
-              <a:t>But enjoying the result doesn’t resolve the ethical questions. Something can sound great and still raise concerns about consent, authorship, identity, and appropriation. Sometimes ethical reflection begins with that discomfort, because it signals that something important is at stake, even if we don’t yet have clear answers.</a:t>
+              <a:t>But enjoying the result doesn’t resolve the ethical questions. Something can sound great and still raise concerns about consent, authorship, identity, and appropriation. Sometimes ethical reflection begins with that very discomfort.</a:t>
             </a:r>
             <a:endParaRPr lang="en-US" sz="1800" dirty="0">
               <a:effectLst/>
@@ -5891,22 +5295,13 @@
               </a:spcAft>
             </a:pPr>
             <a:r>
-              <a:rPr lang="en-US" sz="1800" b="1" dirty="0">
-                <a:effectLst/>
-                <a:latin typeface="Calibri" panose="020F0502020204030204" pitchFamily="34" charset="0"/>
-                <a:ea typeface="Times New Roman" panose="02020603050405020304" pitchFamily="18" charset="0"/>
-                <a:cs typeface="Times New Roman" panose="02020603050405020304" pitchFamily="18" charset="0"/>
-              </a:rPr>
-              <a:t>Proposed time:</a:t>
-            </a:r>
-            <a:r>
               <a:rPr lang="en-US" sz="1800" dirty="0">
                 <a:effectLst/>
                 <a:latin typeface="Calibri" panose="020F0502020204030204" pitchFamily="34" charset="0"/>
                 <a:ea typeface="Times New Roman" panose="02020603050405020304" pitchFamily="18" charset="0"/>
                 <a:cs typeface="Times New Roman" panose="02020603050405020304" pitchFamily="18" charset="0"/>
               </a:rPr>
-              <a:t> 1 minute</a:t>
+              <a:t>You might be thinking, “Hasn’t hip-hop always debated authenticity and technology?” Absolutely. Every major innovation has changed ideas about talent, artistry, and originality, forcing artists and audiences to rethink what they value.</a:t>
             </a:r>
             <a:endParaRPr lang="en-US" sz="1800" dirty="0">
               <a:effectLst/>
@@ -5930,7 +5325,7 @@
                 <a:ea typeface="Times New Roman" panose="02020603050405020304" pitchFamily="18" charset="0"/>
                 <a:cs typeface="Times New Roman" panose="02020603050405020304" pitchFamily="18" charset="0"/>
               </a:rPr>
-              <a:t>You might be thinking, “Hasn’t hip-hop always debated authenticity and technology?” Absolutely. Every major innovation has changed ideas about talent, artistry, and originality, forcing artists and audiences to rethink what they value.</a:t>
+              <a:t> </a:t>
             </a:r>
             <a:endParaRPr lang="en-US" sz="1800" dirty="0">
               <a:effectLst/>
@@ -5954,7 +5349,7 @@
                 <a:ea typeface="Times New Roman" panose="02020603050405020304" pitchFamily="18" charset="0"/>
                 <a:cs typeface="Times New Roman" panose="02020603050405020304" pitchFamily="18" charset="0"/>
               </a:rPr>
-              <a:t> </a:t>
+              <a:t>So the real question isn’t the tool itself, but how it changes authorship, labor, and value. Who gets credit? Which skills become invisible? What kinds of creativity are amplified, and which are pushed aside?</a:t>
             </a:r>
             <a:endParaRPr lang="en-US" sz="1800" dirty="0">
               <a:effectLst/>
@@ -5978,7 +5373,7 @@
                 <a:ea typeface="Times New Roman" panose="02020603050405020304" pitchFamily="18" charset="0"/>
                 <a:cs typeface="Times New Roman" panose="02020603050405020304" pitchFamily="18" charset="0"/>
               </a:rPr>
-              <a:t>So the real question isn’t the tool itself, but how it changes authorship, labor, and value. Who gets credit? Which skills become invisible? What kinds of creativity are amplified, and which are pushed aside?</a:t>
+              <a:t> </a:t>
             </a:r>
             <a:endParaRPr lang="en-US" sz="1800" dirty="0">
               <a:effectLst/>
@@ -6002,31 +5397,7 @@
                 <a:ea typeface="Times New Roman" panose="02020603050405020304" pitchFamily="18" charset="0"/>
                 <a:cs typeface="Times New Roman" panose="02020603050405020304" pitchFamily="18" charset="0"/>
               </a:rPr>
-              <a:t> </a:t>
-            </a:r>
-            <a:endParaRPr lang="en-US" sz="1800" dirty="0">
-              <a:effectLst/>
-              <a:latin typeface="Times New Roman" panose="02020603050405020304" pitchFamily="18" charset="0"/>
-              <a:ea typeface="Times New Roman" panose="02020603050405020304" pitchFamily="18" charset="0"/>
-            </a:endParaRPr>
-          </a:p>
-          <a:p>
-            <a:pPr marL="0" marR="0">
-              <a:spcBef>
-                <a:spcPts val="0"/>
-              </a:spcBef>
-              <a:spcAft>
-                <a:spcPts val="0"/>
-              </a:spcAft>
-            </a:pPr>
-            <a:r>
-              <a:rPr lang="en-US" sz="1800" dirty="0">
-                <a:effectLst/>
-                <a:latin typeface="Calibri" panose="020F0502020204030204" pitchFamily="34" charset="0"/>
-                <a:ea typeface="Times New Roman" panose="02020603050405020304" pitchFamily="18" charset="0"/>
-                <a:cs typeface="Times New Roman" panose="02020603050405020304" pitchFamily="18" charset="0"/>
-              </a:rPr>
-              <a:t>Looking at AI through this historical lens helps us avoid moral panic. But it also reminds us that AI is different in one important way: it expands what’s possible at a scale and speed we haven’t seen before.</a:t>
+              <a:t>Looking at AI through this historical lens helps us avoid moral panic. But it also reminds us that AI is different in one important way: it expands what’s possible. And it does so at a scale and speed we haven’t seen before.</a:t>
             </a:r>
             <a:endParaRPr lang="en-US" sz="1800" dirty="0">
               <a:effectLst/>
@@ -6156,22 +5527,13 @@
               </a:spcAft>
             </a:pPr>
             <a:r>
-              <a:rPr lang="en-US" sz="1800" b="1" dirty="0">
-                <a:effectLst/>
-                <a:latin typeface="Calibri" panose="020F0502020204030204" pitchFamily="34" charset="0"/>
-                <a:ea typeface="Times New Roman" panose="02020603050405020304" pitchFamily="18" charset="0"/>
-                <a:cs typeface="Times New Roman" panose="02020603050405020304" pitchFamily="18" charset="0"/>
-              </a:rPr>
-              <a:t>Suggested duration:</a:t>
-            </a:r>
-            <a:r>
               <a:rPr lang="en-US" sz="1800" dirty="0">
                 <a:effectLst/>
                 <a:latin typeface="Calibri" panose="020F0502020204030204" pitchFamily="34" charset="0"/>
                 <a:ea typeface="Times New Roman" panose="02020603050405020304" pitchFamily="18" charset="0"/>
                 <a:cs typeface="Times New Roman" panose="02020603050405020304" pitchFamily="18" charset="0"/>
               </a:rPr>
-              <a:t> 1 minute 20 seconds</a:t>
+              <a:t>Originally a narrow pitch-correction tool, Auto-Tune became a distinct artistic style popularized by artists like T-Pain. Its rise sparked a familiar debate: critics called it cheating, while supporters saw innovation. Eventually, the technology became normalized, shifting the ethical debate rather than ending it.</a:t>
             </a:r>
             <a:endParaRPr lang="en-US" sz="1800" dirty="0">
               <a:effectLst/>
@@ -6195,7 +5557,7 @@
                 <a:ea typeface="Times New Roman" panose="02020603050405020304" pitchFamily="18" charset="0"/>
                 <a:cs typeface="Times New Roman" panose="02020603050405020304" pitchFamily="18" charset="0"/>
               </a:rPr>
-              <a:t>Originally a narrow pitch-correction tool, Auto-Tune became a distinct artistic style popularized by artists like T-Pain. Its rise sparked a familiar debate: critics called it cheating, while supporters saw innovation. Eventually, the technology became normalized, shifting the ethical debate rather than ending it.</a:t>
+              <a:t> </a:t>
             </a:r>
             <a:endParaRPr lang="en-US" sz="1800" dirty="0">
               <a:effectLst/>
@@ -6219,31 +5581,7 @@
                 <a:ea typeface="Times New Roman" panose="02020603050405020304" pitchFamily="18" charset="0"/>
                 <a:cs typeface="Times New Roman" panose="02020603050405020304" pitchFamily="18" charset="0"/>
               </a:rPr>
-              <a:t> </a:t>
-            </a:r>
-            <a:endParaRPr lang="en-US" sz="1800" dirty="0">
-              <a:effectLst/>
-              <a:latin typeface="Times New Roman" panose="02020603050405020304" pitchFamily="18" charset="0"/>
-              <a:ea typeface="Times New Roman" panose="02020603050405020304" pitchFamily="18" charset="0"/>
-            </a:endParaRPr>
-          </a:p>
-          <a:p>
-            <a:pPr marL="0" marR="0">
-              <a:spcBef>
-                <a:spcPts val="0"/>
-              </a:spcBef>
-              <a:spcAft>
-                <a:spcPts val="0"/>
-              </a:spcAft>
-            </a:pPr>
-            <a:r>
-              <a:rPr lang="en-US" sz="1800" dirty="0">
-                <a:effectLst/>
-                <a:latin typeface="Calibri" panose="020F0502020204030204" pitchFamily="34" charset="0"/>
-                <a:ea typeface="Times New Roman" panose="02020603050405020304" pitchFamily="18" charset="0"/>
-                <a:cs typeface="Times New Roman" panose="02020603050405020304" pitchFamily="18" charset="0"/>
-              </a:rPr>
-              <a:t>follows a similar trajectory but goes much further. Instead of modifying a single element like Auto-Tune, AI can generate beats, lyrics, vocals, and performance cues simultaneously. This total automation is why the stakes now feel entirely different</a:t>
+              <a:t>AI follows a similar trajectory but goes much further. Instead of modifying a single element like Auto-Tune, AI can generate beats, lyrics, vocals, and performance cues simultaneously. This total automation is why the stakes now feel entirely different</a:t>
             </a:r>
             <a:endParaRPr lang="en-US" sz="1800" dirty="0">
               <a:effectLst/>
@@ -6373,22 +5711,13 @@
               </a:spcAft>
             </a:pPr>
             <a:r>
-              <a:rPr lang="en-US" sz="1800" b="1" dirty="0">
-                <a:effectLst/>
-                <a:latin typeface="Calibri" panose="020F0502020204030204" pitchFamily="34" charset="0"/>
-                <a:ea typeface="Times New Roman" panose="02020603050405020304" pitchFamily="18" charset="0"/>
-                <a:cs typeface="Times New Roman" panose="02020603050405020304" pitchFamily="18" charset="0"/>
-              </a:rPr>
-              <a:t>Suggested duration:</a:t>
-            </a:r>
-            <a:r>
               <a:rPr lang="en-US" sz="1800" dirty="0">
                 <a:effectLst/>
                 <a:latin typeface="Calibri" panose="020F0502020204030204" pitchFamily="34" charset="0"/>
                 <a:ea typeface="Times New Roman" panose="02020603050405020304" pitchFamily="18" charset="0"/>
                 <a:cs typeface="Times New Roman" panose="02020603050405020304" pitchFamily="18" charset="0"/>
               </a:rPr>
-              <a:t> 1 minute 20 seconds</a:t>
+              <a:t>Sampling has always been a cornerstone of hip-hop. Producers create something new by selecting, layering, and transforming existing sounds, and while sampling has long raised questions about ownership and compensation, it remains a deeply creative practice rooted in musical knowledge and cultural awareness.</a:t>
             </a:r>
             <a:endParaRPr lang="en-US" sz="1800" dirty="0">
               <a:effectLst/>
@@ -6412,7 +5741,7 @@
                 <a:ea typeface="Times New Roman" panose="02020603050405020304" pitchFamily="18" charset="0"/>
                 <a:cs typeface="Times New Roman" panose="02020603050405020304" pitchFamily="18" charset="0"/>
               </a:rPr>
-              <a:t>Another useful comparison is sampling. Producers create meaning through selection, layering, and transformation, making sampling a creative practice that has long raised questions about ownership and compensation.</a:t>
+              <a:t> </a:t>
             </a:r>
             <a:endParaRPr lang="en-US" sz="1800" dirty="0">
               <a:effectLst/>
@@ -6436,7 +5765,7 @@
                 <a:ea typeface="Times New Roman" panose="02020603050405020304" pitchFamily="18" charset="0"/>
                 <a:cs typeface="Times New Roman" panose="02020603050405020304" pitchFamily="18" charset="0"/>
               </a:rPr>
-              <a:t> </a:t>
+              <a:t>AI also builds on what came before, but it does so on a vastly larger scale and with much less transparency. The challenge is not that borrowing occurs. Borrowing has always been part of art. But whether we can still identify who contributed, who deserves credit, and whether works were used without consent.</a:t>
             </a:r>
             <a:endParaRPr lang="en-US" sz="1800" dirty="0">
               <a:effectLst/>
@@ -6460,31 +5789,7 @@
                 <a:ea typeface="Times New Roman" panose="02020603050405020304" pitchFamily="18" charset="0"/>
                 <a:cs typeface="Times New Roman" panose="02020603050405020304" pitchFamily="18" charset="0"/>
               </a:rPr>
-              <a:t>AI also borrows, but at a much larger scale and with far less traceability. Attribution and accountability become harder to maintain.</a:t>
-            </a:r>
-            <a:endParaRPr lang="en-US" sz="1800" dirty="0">
-              <a:effectLst/>
-              <a:latin typeface="Times New Roman" panose="02020603050405020304" pitchFamily="18" charset="0"/>
-              <a:ea typeface="Times New Roman" panose="02020603050405020304" pitchFamily="18" charset="0"/>
-            </a:endParaRPr>
-          </a:p>
-          <a:p>
-            <a:pPr marL="0" marR="0">
-              <a:spcBef>
-                <a:spcPts val="0"/>
-              </a:spcBef>
-              <a:spcAft>
-                <a:spcPts val="0"/>
-              </a:spcAft>
-            </a:pPr>
-            <a:r>
-              <a:rPr lang="en-US" sz="1800" dirty="0">
-                <a:effectLst/>
-                <a:latin typeface="Calibri" panose="020F0502020204030204" pitchFamily="34" charset="0"/>
-                <a:ea typeface="Times New Roman" panose="02020603050405020304" pitchFamily="18" charset="0"/>
-                <a:cs typeface="Times New Roman" panose="02020603050405020304" pitchFamily="18" charset="0"/>
-              </a:rPr>
-              <a:t>So the issue is not whether borrowing happens; it always has. The question is whether we can still identify who contributed, who deserves credit, and what was used without consent.</a:t>
+              <a:t>Traditional sampling demanded cultural labor. Producers spent years learning musical history, digging through records, and developing the craft of discovering and reinterpreting sounds. AI shifts much of that knowledge from the artist to the model, allowing users to generate polished music from a simple prompt. While this accessibility expands creative possibilities, it also risks disconnecting the output from the traditions and histories that shaped it. When lineage, effort, and source knowledge fade from view, cultural memory itself becomes harder to preserve.</a:t>
             </a:r>
             <a:endParaRPr lang="en-US" sz="1800" dirty="0">
               <a:effectLst/>
@@ -6594,7 +5899,7 @@
                 <a:latin typeface="Calibri" panose="020F0502020204030204" pitchFamily="34" charset="0"/>
                 <a:cs typeface="Times New Roman" panose="02020603050405020304" pitchFamily="18" charset="0"/>
               </a:rPr>
-              <a:t>Slide 9. From Crate-Digging to Prompting</a:t>
+              <a:t>Slide 9. AI In Music Today</a:t>
             </a:r>
             <a:endParaRPr lang="en-US" sz="1800" b="1" dirty="0">
               <a:solidFill>
@@ -6614,22 +5919,13 @@
               </a:spcAft>
             </a:pPr>
             <a:r>
-              <a:rPr lang="en-US" sz="1800" b="1" dirty="0">
-                <a:effectLst/>
-                <a:latin typeface="Calibri" panose="020F0502020204030204" pitchFamily="34" charset="0"/>
-                <a:ea typeface="Times New Roman" panose="02020603050405020304" pitchFamily="18" charset="0"/>
-                <a:cs typeface="Times New Roman" panose="02020603050405020304" pitchFamily="18" charset="0"/>
-              </a:rPr>
-              <a:t>Suggested duration:</a:t>
-            </a:r>
-            <a:r>
               <a:rPr lang="en-US" sz="1800" dirty="0">
                 <a:effectLst/>
                 <a:latin typeface="Calibri" panose="020F0502020204030204" pitchFamily="34" charset="0"/>
                 <a:ea typeface="Times New Roman" panose="02020603050405020304" pitchFamily="18" charset="0"/>
                 <a:cs typeface="Times New Roman" panose="02020603050405020304" pitchFamily="18" charset="0"/>
               </a:rPr>
-              <a:t> 1 minute 10 seconds</a:t>
+              <a:t>Lets talk about what current AI music systems can actually do.</a:t>
             </a:r>
             <a:endParaRPr lang="en-US" sz="1800" dirty="0">
               <a:effectLst/>
@@ -6653,25 +5949,7 @@
                 <a:ea typeface="Times New Roman" panose="02020603050405020304" pitchFamily="18" charset="0"/>
                 <a:cs typeface="Times New Roman" panose="02020603050405020304" pitchFamily="18" charset="0"/>
               </a:rPr>
-              <a:t>Traditionally, sampling required deep cultural </a:t>
-            </a:r>
-            <a:r>
-              <a:rPr lang="en-US" sz="1800" dirty="0" err="1">
-                <a:effectLst/>
-                <a:latin typeface="Calibri" panose="020F0502020204030204" pitchFamily="34" charset="0"/>
-                <a:ea typeface="Times New Roman" panose="02020603050405020304" pitchFamily="18" charset="0"/>
-                <a:cs typeface="Times New Roman" panose="02020603050405020304" pitchFamily="18" charset="0"/>
-              </a:rPr>
-              <a:t>labor:digging</a:t>
-            </a:r>
-            <a:r>
-              <a:rPr lang="en-US" sz="1800" dirty="0">
-                <a:effectLst/>
-                <a:latin typeface="Calibri" panose="020F0502020204030204" pitchFamily="34" charset="0"/>
-                <a:ea typeface="Times New Roman" panose="02020603050405020304" pitchFamily="18" charset="0"/>
-                <a:cs typeface="Times New Roman" panose="02020603050405020304" pitchFamily="18" charset="0"/>
-              </a:rPr>
-              <a:t> through records, knowing musical history, and mastering the craft of finding obscure sounds.</a:t>
+              <a:t> </a:t>
             </a:r>
             <a:endParaRPr lang="en-US" sz="1800" dirty="0">
               <a:effectLst/>
@@ -6695,23 +5973,17 @@
                 <a:ea typeface="Times New Roman" panose="02020603050405020304" pitchFamily="18" charset="0"/>
                 <a:cs typeface="Times New Roman" panose="02020603050405020304" pitchFamily="18" charset="0"/>
               </a:rPr>
-              <a:t> </a:t>
-            </a:r>
-            <a:endParaRPr lang="en-US" sz="1800" dirty="0">
-              <a:effectLst/>
-              <a:latin typeface="Times New Roman" panose="02020603050405020304" pitchFamily="18" charset="0"/>
-              <a:ea typeface="Times New Roman" panose="02020603050405020304" pitchFamily="18" charset="0"/>
-            </a:endParaRPr>
-          </a:p>
-          <a:p>
-            <a:pPr marL="0" marR="0">
-              <a:spcBef>
-                <a:spcPts val="0"/>
-              </a:spcBef>
-              <a:spcAft>
-                <a:spcPts val="0"/>
-              </a:spcAft>
-            </a:pPr>
+              <a:t>Today’s AI music systems can generate beats, melodies, lyrics, vocals, and even release-ready tracks. Tools like </a:t>
+            </a:r>
+            <a:r>
+              <a:rPr lang="en-US" sz="1800" dirty="0" err="1">
+                <a:effectLst/>
+                <a:latin typeface="Calibri" panose="020F0502020204030204" pitchFamily="34" charset="0"/>
+                <a:ea typeface="Times New Roman" panose="02020603050405020304" pitchFamily="18" charset="0"/>
+                <a:cs typeface="Times New Roman" panose="02020603050405020304" pitchFamily="18" charset="0"/>
+              </a:rPr>
+              <a:t>Suno</a:t>
+            </a:r>
             <a:r>
               <a:rPr lang="en-US" sz="1800" dirty="0">
                 <a:effectLst/>
@@ -6719,23 +5991,17 @@
                 <a:ea typeface="Times New Roman" panose="02020603050405020304" pitchFamily="18" charset="0"/>
                 <a:cs typeface="Times New Roman" panose="02020603050405020304" pitchFamily="18" charset="0"/>
               </a:rPr>
-              <a:t>AI shifts that historical knowledge from the creator to the model. Users can now generate music instantly with a simple prompt, bypassing direct engagement with the traditions behind the output.</a:t>
-            </a:r>
-            <a:endParaRPr lang="en-US" sz="1800" dirty="0">
-              <a:effectLst/>
-              <a:latin typeface="Times New Roman" panose="02020603050405020304" pitchFamily="18" charset="0"/>
-              <a:ea typeface="Times New Roman" panose="02020603050405020304" pitchFamily="18" charset="0"/>
-            </a:endParaRPr>
-          </a:p>
-          <a:p>
-            <a:pPr marL="0" marR="0">
-              <a:spcBef>
-                <a:spcPts val="0"/>
-              </a:spcBef>
-              <a:spcAft>
-                <a:spcPts val="0"/>
-              </a:spcAft>
-            </a:pPr>
+              <a:t> and </a:t>
+            </a:r>
+            <a:r>
+              <a:rPr lang="en-US" sz="1800" dirty="0" err="1">
+                <a:effectLst/>
+                <a:latin typeface="Calibri" panose="020F0502020204030204" pitchFamily="34" charset="0"/>
+                <a:ea typeface="Times New Roman" panose="02020603050405020304" pitchFamily="18" charset="0"/>
+                <a:cs typeface="Times New Roman" panose="02020603050405020304" pitchFamily="18" charset="0"/>
+              </a:rPr>
+              <a:t>Udio</a:t>
+            </a:r>
             <a:r>
               <a:rPr lang="en-US" sz="1800" dirty="0">
                 <a:effectLst/>
@@ -6743,31 +6009,7 @@
                 <a:ea typeface="Times New Roman" panose="02020603050405020304" pitchFamily="18" charset="0"/>
                 <a:cs typeface="Times New Roman" panose="02020603050405020304" pitchFamily="18" charset="0"/>
               </a:rPr>
-              <a:t> </a:t>
-            </a:r>
-            <a:endParaRPr lang="en-US" sz="1800" dirty="0">
-              <a:effectLst/>
-              <a:latin typeface="Times New Roman" panose="02020603050405020304" pitchFamily="18" charset="0"/>
-              <a:ea typeface="Times New Roman" panose="02020603050405020304" pitchFamily="18" charset="0"/>
-            </a:endParaRPr>
-          </a:p>
-          <a:p>
-            <a:pPr marL="0" marR="0">
-              <a:spcBef>
-                <a:spcPts val="0"/>
-              </a:spcBef>
-              <a:spcAft>
-                <a:spcPts val="0"/>
-              </a:spcAft>
-            </a:pPr>
-            <a:r>
-              <a:rPr lang="en-US" sz="1800" dirty="0">
-                <a:effectLst/>
-                <a:latin typeface="Calibri" panose="020F0502020204030204" pitchFamily="34" charset="0"/>
-                <a:ea typeface="Times New Roman" panose="02020603050405020304" pitchFamily="18" charset="0"/>
-                <a:cs typeface="Times New Roman" panose="02020603050405020304" pitchFamily="18" charset="0"/>
-              </a:rPr>
-              <a:t>While convenient, this ease introduces a form of cultural erasure. When effort, lineage, and source knowledge disappear, cultural memory weakens, making it harder to recognize the underlying history that made the music possible.</a:t>
+              <a:t> have made music creation far more accessible, allowing people with little production experience to create and share songs quickly.</a:t>
             </a:r>
             <a:endParaRPr lang="en-US" sz="1800" dirty="0">
               <a:effectLst/>
